--- a/문제해결프로그래밍_숙제/제출용/숙제6_2022182035.pptx
+++ b/문제해결프로그래밍_숙제/제출용/숙제6_2022182035.pptx
@@ -34500,23 +34500,83 @@
           </a:bodyPr>
           <a:lstStyle/>
           <a:p>
-            <a:pPr marL="50800" lvl="0" algn="ctr" rtl="0">
-              <a:spcBef>
-                <a:spcPts val="0"/>
-              </a:spcBef>
-              <a:spcAft>
-                <a:spcPts val="0"/>
-              </a:spcAft>
-              <a:buSzPts val="2800"/>
-            </a:pPr>
+            <a:pPr marL="50800" lvl="0"/>
             <a:r>
               <a:rPr lang="en-US" dirty="0"/>
               <a:t>5. </a:t>
+            </a:r>
+            <a:r>
+              <a:rPr lang="ko-KR" altLang="en-US" dirty="0"/>
+              <a:t>도둑질 </a:t>
+            </a:r>
+            <a:r>
+              <a:rPr lang="en-US" altLang="ko-KR" dirty="0"/>
+              <a:t>(Programmers, DP) </a:t>
             </a:r>
             <a:endParaRPr dirty="0"/>
           </a:p>
         </p:txBody>
       </p:sp>
+      <p:pic>
+        <p:nvPicPr>
+          <p:cNvPr id="3" name="그림 2">
+            <a:extLst>
+              <a:ext uri="{FF2B5EF4-FFF2-40B4-BE49-F238E27FC236}">
+                <a16:creationId xmlns:a16="http://schemas.microsoft.com/office/drawing/2014/main" id="{7DF8B7D5-B490-EAA7-693D-B0E0EA5953EC}"/>
+              </a:ext>
+            </a:extLst>
+          </p:cNvPr>
+          <p:cNvPicPr>
+            <a:picLocks noChangeAspect="1"/>
+          </p:cNvPicPr>
+          <p:nvPr/>
+        </p:nvPicPr>
+        <p:blipFill>
+          <a:blip r:embed="rId3"/>
+          <a:stretch>
+            <a:fillRect/>
+          </a:stretch>
+        </p:blipFill>
+        <p:spPr>
+          <a:xfrm>
+            <a:off x="5025295" y="1142996"/>
+            <a:ext cx="1955007" cy="3233057"/>
+          </a:xfrm>
+          <a:prstGeom prst="rect">
+            <a:avLst/>
+          </a:prstGeom>
+        </p:spPr>
+      </p:pic>
+      <p:pic>
+        <p:nvPicPr>
+          <p:cNvPr id="5" name="그림 4">
+            <a:extLst>
+              <a:ext uri="{FF2B5EF4-FFF2-40B4-BE49-F238E27FC236}">
+                <a16:creationId xmlns:a16="http://schemas.microsoft.com/office/drawing/2014/main" id="{B93E40DD-5738-5C8B-722F-5202A42F2780}"/>
+              </a:ext>
+            </a:extLst>
+          </p:cNvPr>
+          <p:cNvPicPr>
+            <a:picLocks noChangeAspect="1"/>
+          </p:cNvPicPr>
+          <p:nvPr/>
+        </p:nvPicPr>
+        <p:blipFill>
+          <a:blip r:embed="rId4"/>
+          <a:stretch>
+            <a:fillRect/>
+          </a:stretch>
+        </p:blipFill>
+        <p:spPr>
+          <a:xfrm>
+            <a:off x="1067664" y="1114250"/>
+            <a:ext cx="3430846" cy="3290551"/>
+          </a:xfrm>
+          <a:prstGeom prst="rect">
+            <a:avLst/>
+          </a:prstGeom>
+        </p:spPr>
+      </p:pic>
     </p:spTree>
     <p:extLst>
       <p:ext uri="{BB962C8B-B14F-4D97-AF65-F5344CB8AC3E}">

--- a/문제해결프로그래밍_숙제/제출용/숙제6_2022182035.pptx
+++ b/문제해결프로그래밍_숙제/제출용/숙제6_2022182035.pptx
@@ -5,7 +5,7 @@
     <p:sldMasterId id="2147483670" r:id="rId1"/>
   </p:sldMasterIdLst>
   <p:notesMasterIdLst>
-    <p:notesMasterId r:id="rId9"/>
+    <p:notesMasterId r:id="rId12"/>
   </p:notesMasterIdLst>
   <p:sldIdLst>
     <p:sldId id="256" r:id="rId2"/>
@@ -15,21 +15,24 @@
     <p:sldId id="260" r:id="rId6"/>
     <p:sldId id="261" r:id="rId7"/>
     <p:sldId id="262" r:id="rId8"/>
+    <p:sldId id="263" r:id="rId9"/>
+    <p:sldId id="264" r:id="rId10"/>
+    <p:sldId id="265" r:id="rId11"/>
   </p:sldIdLst>
   <p:sldSz cx="9144000" cy="5143500" type="screen16x9"/>
   <p:notesSz cx="6858000" cy="9144000"/>
   <p:embeddedFontLst>
     <p:embeddedFont>
       <p:font typeface="Jost" panose="020B0600000101010101" charset="0"/>
-      <p:regular r:id="rId10"/>
-      <p:bold r:id="rId11"/>
-      <p:italic r:id="rId12"/>
-      <p:boldItalic r:id="rId13"/>
+      <p:regular r:id="rId13"/>
+      <p:bold r:id="rId14"/>
+      <p:italic r:id="rId15"/>
+      <p:boldItalic r:id="rId16"/>
     </p:embeddedFont>
     <p:embeddedFont>
       <p:font typeface="Palanquin Dark" panose="020B0600000101010101" charset="0"/>
-      <p:regular r:id="rId14"/>
-      <p:bold r:id="rId15"/>
+      <p:regular r:id="rId17"/>
+      <p:bold r:id="rId18"/>
     </p:embeddedFont>
   </p:embeddedFontLst>
   <p:defaultTextStyle>
@@ -825,6 +828,133 @@
 </p:notes>
 </file>
 
+<file path=ppt/notesSlides/notesSlide10.xml><?xml version="1.0" encoding="utf-8"?>
+<p:notes xmlns:a="http://schemas.openxmlformats.org/drawingml/2006/main" xmlns:r="http://schemas.openxmlformats.org/officeDocument/2006/relationships" xmlns:p="http://schemas.openxmlformats.org/presentationml/2006/main" showMasterSp="0" showMasterPhAnim="0">
+  <p:cSld>
+    <p:spTree>
+      <p:nvGrpSpPr>
+        <p:cNvPr id="1" name="Shape 431">
+          <a:extLst>
+            <a:ext uri="{FF2B5EF4-FFF2-40B4-BE49-F238E27FC236}">
+              <a16:creationId xmlns:a16="http://schemas.microsoft.com/office/drawing/2014/main" id="{EA570A10-2E12-FE93-F21B-262414465D2F}"/>
+            </a:ext>
+          </a:extLst>
+        </p:cNvPr>
+        <p:cNvGrpSpPr/>
+        <p:nvPr/>
+      </p:nvGrpSpPr>
+      <p:grpSpPr>
+        <a:xfrm>
+          <a:off x="0" y="0"/>
+          <a:ext cx="0" cy="0"/>
+          <a:chOff x="0" y="0"/>
+          <a:chExt cx="0" cy="0"/>
+        </a:xfrm>
+      </p:grpSpPr>
+      <p:sp>
+        <p:nvSpPr>
+          <p:cNvPr id="432" name="Google Shape;432;g3cf4798b604_0_426:notes">
+            <a:extLst>
+              <a:ext uri="{FF2B5EF4-FFF2-40B4-BE49-F238E27FC236}">
+                <a16:creationId xmlns:a16="http://schemas.microsoft.com/office/drawing/2014/main" id="{3B18D226-8CFE-4539-1A2C-F9DDDA3A1CDB}"/>
+              </a:ext>
+            </a:extLst>
+          </p:cNvPr>
+          <p:cNvSpPr>
+            <a:spLocks noGrp="1" noRot="1" noChangeAspect="1"/>
+          </p:cNvSpPr>
+          <p:nvPr>
+            <p:ph type="sldImg" idx="2"/>
+          </p:nvPr>
+        </p:nvSpPr>
+        <p:spPr>
+          <a:xfrm>
+            <a:off x="381000" y="685800"/>
+            <a:ext cx="6096000" cy="3429000"/>
+          </a:xfrm>
+          <a:custGeom>
+            <a:avLst/>
+            <a:gdLst/>
+            <a:ahLst/>
+            <a:cxnLst/>
+            <a:rect l="l" t="t" r="r" b="b"/>
+            <a:pathLst>
+              <a:path w="120000" h="120000" extrusionOk="0">
+                <a:moveTo>
+                  <a:pt x="0" y="0"/>
+                </a:moveTo>
+                <a:lnTo>
+                  <a:pt x="120000" y="0"/>
+                </a:lnTo>
+                <a:lnTo>
+                  <a:pt x="120000" y="120000"/>
+                </a:lnTo>
+                <a:lnTo>
+                  <a:pt x="0" y="120000"/>
+                </a:lnTo>
+                <a:close/>
+              </a:path>
+            </a:pathLst>
+          </a:custGeom>
+        </p:spPr>
+      </p:sp>
+      <p:sp>
+        <p:nvSpPr>
+          <p:cNvPr id="433" name="Google Shape;433;g3cf4798b604_0_426:notes">
+            <a:extLst>
+              <a:ext uri="{FF2B5EF4-FFF2-40B4-BE49-F238E27FC236}">
+                <a16:creationId xmlns:a16="http://schemas.microsoft.com/office/drawing/2014/main" id="{BA9ED41D-49B4-F321-6818-089A4B9B4802}"/>
+              </a:ext>
+            </a:extLst>
+          </p:cNvPr>
+          <p:cNvSpPr txBox="1">
+            <a:spLocks noGrp="1"/>
+          </p:cNvSpPr>
+          <p:nvPr>
+            <p:ph type="body" idx="1"/>
+          </p:nvPr>
+        </p:nvSpPr>
+        <p:spPr>
+          <a:xfrm>
+            <a:off x="685800" y="4343400"/>
+            <a:ext cx="5486400" cy="4114800"/>
+          </a:xfrm>
+          <a:prstGeom prst="rect">
+            <a:avLst/>
+          </a:prstGeom>
+        </p:spPr>
+        <p:txBody>
+          <a:bodyPr spcFirstLastPara="1" wrap="square" lIns="91425" tIns="91425" rIns="91425" bIns="91425" anchor="t" anchorCtr="0">
+            <a:noAutofit/>
+          </a:bodyPr>
+          <a:lstStyle/>
+          <a:p>
+            <a:pPr marL="0" lvl="0" indent="0" algn="l" rtl="0">
+              <a:spcBef>
+                <a:spcPts val="0"/>
+              </a:spcBef>
+              <a:spcAft>
+                <a:spcPts val="0"/>
+              </a:spcAft>
+              <a:buNone/>
+            </a:pPr>
+            <a:endParaRPr/>
+          </a:p>
+        </p:txBody>
+      </p:sp>
+    </p:spTree>
+    <p:extLst>
+      <p:ext uri="{BB962C8B-B14F-4D97-AF65-F5344CB8AC3E}">
+        <p14:creationId xmlns:p14="http://schemas.microsoft.com/office/powerpoint/2010/main" val="2585931302"/>
+      </p:ext>
+    </p:extLst>
+  </p:cSld>
+  <p:clrMapOvr>
+    <a:masterClrMapping/>
+  </p:clrMapOvr>
+</p:notes>
+</file>
+
 <file path=ppt/notesSlides/notesSlide2.xml><?xml version="1.0" encoding="utf-8"?>
 <p:notes xmlns:a="http://schemas.openxmlformats.org/drawingml/2006/main" xmlns:r="http://schemas.openxmlformats.org/officeDocument/2006/relationships" xmlns:p="http://schemas.openxmlformats.org/presentationml/2006/main" showMasterSp="0" showMasterPhAnim="0">
   <p:cSld>
@@ -1578,6 +1708,260 @@
     <p:extLst>
       <p:ext uri="{BB962C8B-B14F-4D97-AF65-F5344CB8AC3E}">
         <p14:creationId xmlns:p14="http://schemas.microsoft.com/office/powerpoint/2010/main" val="2067769389"/>
+      </p:ext>
+    </p:extLst>
+  </p:cSld>
+  <p:clrMapOvr>
+    <a:masterClrMapping/>
+  </p:clrMapOvr>
+</p:notes>
+</file>
+
+<file path=ppt/notesSlides/notesSlide8.xml><?xml version="1.0" encoding="utf-8"?>
+<p:notes xmlns:a="http://schemas.openxmlformats.org/drawingml/2006/main" xmlns:r="http://schemas.openxmlformats.org/officeDocument/2006/relationships" xmlns:p="http://schemas.openxmlformats.org/presentationml/2006/main" showMasterSp="0" showMasterPhAnim="0">
+  <p:cSld>
+    <p:spTree>
+      <p:nvGrpSpPr>
+        <p:cNvPr id="1" name="Shape 431">
+          <a:extLst>
+            <a:ext uri="{FF2B5EF4-FFF2-40B4-BE49-F238E27FC236}">
+              <a16:creationId xmlns:a16="http://schemas.microsoft.com/office/drawing/2014/main" id="{25202929-7E1A-D68C-38A0-E58FBA6EA8BB}"/>
+            </a:ext>
+          </a:extLst>
+        </p:cNvPr>
+        <p:cNvGrpSpPr/>
+        <p:nvPr/>
+      </p:nvGrpSpPr>
+      <p:grpSpPr>
+        <a:xfrm>
+          <a:off x="0" y="0"/>
+          <a:ext cx="0" cy="0"/>
+          <a:chOff x="0" y="0"/>
+          <a:chExt cx="0" cy="0"/>
+        </a:xfrm>
+      </p:grpSpPr>
+      <p:sp>
+        <p:nvSpPr>
+          <p:cNvPr id="432" name="Google Shape;432;g3cf4798b604_0_426:notes">
+            <a:extLst>
+              <a:ext uri="{FF2B5EF4-FFF2-40B4-BE49-F238E27FC236}">
+                <a16:creationId xmlns:a16="http://schemas.microsoft.com/office/drawing/2014/main" id="{B6BDA095-BFEB-B2AE-C614-FD28031051D5}"/>
+              </a:ext>
+            </a:extLst>
+          </p:cNvPr>
+          <p:cNvSpPr>
+            <a:spLocks noGrp="1" noRot="1" noChangeAspect="1"/>
+          </p:cNvSpPr>
+          <p:nvPr>
+            <p:ph type="sldImg" idx="2"/>
+          </p:nvPr>
+        </p:nvSpPr>
+        <p:spPr>
+          <a:xfrm>
+            <a:off x="381000" y="685800"/>
+            <a:ext cx="6096000" cy="3429000"/>
+          </a:xfrm>
+          <a:custGeom>
+            <a:avLst/>
+            <a:gdLst/>
+            <a:ahLst/>
+            <a:cxnLst/>
+            <a:rect l="l" t="t" r="r" b="b"/>
+            <a:pathLst>
+              <a:path w="120000" h="120000" extrusionOk="0">
+                <a:moveTo>
+                  <a:pt x="0" y="0"/>
+                </a:moveTo>
+                <a:lnTo>
+                  <a:pt x="120000" y="0"/>
+                </a:lnTo>
+                <a:lnTo>
+                  <a:pt x="120000" y="120000"/>
+                </a:lnTo>
+                <a:lnTo>
+                  <a:pt x="0" y="120000"/>
+                </a:lnTo>
+                <a:close/>
+              </a:path>
+            </a:pathLst>
+          </a:custGeom>
+        </p:spPr>
+      </p:sp>
+      <p:sp>
+        <p:nvSpPr>
+          <p:cNvPr id="433" name="Google Shape;433;g3cf4798b604_0_426:notes">
+            <a:extLst>
+              <a:ext uri="{FF2B5EF4-FFF2-40B4-BE49-F238E27FC236}">
+                <a16:creationId xmlns:a16="http://schemas.microsoft.com/office/drawing/2014/main" id="{C8CC789D-57CD-D119-D4CF-637195A603CF}"/>
+              </a:ext>
+            </a:extLst>
+          </p:cNvPr>
+          <p:cNvSpPr txBox="1">
+            <a:spLocks noGrp="1"/>
+          </p:cNvSpPr>
+          <p:nvPr>
+            <p:ph type="body" idx="1"/>
+          </p:nvPr>
+        </p:nvSpPr>
+        <p:spPr>
+          <a:xfrm>
+            <a:off x="685800" y="4343400"/>
+            <a:ext cx="5486400" cy="4114800"/>
+          </a:xfrm>
+          <a:prstGeom prst="rect">
+            <a:avLst/>
+          </a:prstGeom>
+        </p:spPr>
+        <p:txBody>
+          <a:bodyPr spcFirstLastPara="1" wrap="square" lIns="91425" tIns="91425" rIns="91425" bIns="91425" anchor="t" anchorCtr="0">
+            <a:noAutofit/>
+          </a:bodyPr>
+          <a:lstStyle/>
+          <a:p>
+            <a:pPr marL="0" lvl="0" indent="0" algn="l" rtl="0">
+              <a:spcBef>
+                <a:spcPts val="0"/>
+              </a:spcBef>
+              <a:spcAft>
+                <a:spcPts val="0"/>
+              </a:spcAft>
+              <a:buNone/>
+            </a:pPr>
+            <a:endParaRPr/>
+          </a:p>
+        </p:txBody>
+      </p:sp>
+    </p:spTree>
+    <p:extLst>
+      <p:ext uri="{BB962C8B-B14F-4D97-AF65-F5344CB8AC3E}">
+        <p14:creationId xmlns:p14="http://schemas.microsoft.com/office/powerpoint/2010/main" val="289213294"/>
+      </p:ext>
+    </p:extLst>
+  </p:cSld>
+  <p:clrMapOvr>
+    <a:masterClrMapping/>
+  </p:clrMapOvr>
+</p:notes>
+</file>
+
+<file path=ppt/notesSlides/notesSlide9.xml><?xml version="1.0" encoding="utf-8"?>
+<p:notes xmlns:a="http://schemas.openxmlformats.org/drawingml/2006/main" xmlns:r="http://schemas.openxmlformats.org/officeDocument/2006/relationships" xmlns:p="http://schemas.openxmlformats.org/presentationml/2006/main" showMasterSp="0" showMasterPhAnim="0">
+  <p:cSld>
+    <p:spTree>
+      <p:nvGrpSpPr>
+        <p:cNvPr id="1" name="Shape 431">
+          <a:extLst>
+            <a:ext uri="{FF2B5EF4-FFF2-40B4-BE49-F238E27FC236}">
+              <a16:creationId xmlns:a16="http://schemas.microsoft.com/office/drawing/2014/main" id="{D3D0CD33-17AC-3CA6-DE55-B766663936EF}"/>
+            </a:ext>
+          </a:extLst>
+        </p:cNvPr>
+        <p:cNvGrpSpPr/>
+        <p:nvPr/>
+      </p:nvGrpSpPr>
+      <p:grpSpPr>
+        <a:xfrm>
+          <a:off x="0" y="0"/>
+          <a:ext cx="0" cy="0"/>
+          <a:chOff x="0" y="0"/>
+          <a:chExt cx="0" cy="0"/>
+        </a:xfrm>
+      </p:grpSpPr>
+      <p:sp>
+        <p:nvSpPr>
+          <p:cNvPr id="432" name="Google Shape;432;g3cf4798b604_0_426:notes">
+            <a:extLst>
+              <a:ext uri="{FF2B5EF4-FFF2-40B4-BE49-F238E27FC236}">
+                <a16:creationId xmlns:a16="http://schemas.microsoft.com/office/drawing/2014/main" id="{7D9C4014-3546-668E-16AC-434E3482B98A}"/>
+              </a:ext>
+            </a:extLst>
+          </p:cNvPr>
+          <p:cNvSpPr>
+            <a:spLocks noGrp="1" noRot="1" noChangeAspect="1"/>
+          </p:cNvSpPr>
+          <p:nvPr>
+            <p:ph type="sldImg" idx="2"/>
+          </p:nvPr>
+        </p:nvSpPr>
+        <p:spPr>
+          <a:xfrm>
+            <a:off x="381000" y="685800"/>
+            <a:ext cx="6096000" cy="3429000"/>
+          </a:xfrm>
+          <a:custGeom>
+            <a:avLst/>
+            <a:gdLst/>
+            <a:ahLst/>
+            <a:cxnLst/>
+            <a:rect l="l" t="t" r="r" b="b"/>
+            <a:pathLst>
+              <a:path w="120000" h="120000" extrusionOk="0">
+                <a:moveTo>
+                  <a:pt x="0" y="0"/>
+                </a:moveTo>
+                <a:lnTo>
+                  <a:pt x="120000" y="0"/>
+                </a:lnTo>
+                <a:lnTo>
+                  <a:pt x="120000" y="120000"/>
+                </a:lnTo>
+                <a:lnTo>
+                  <a:pt x="0" y="120000"/>
+                </a:lnTo>
+                <a:close/>
+              </a:path>
+            </a:pathLst>
+          </a:custGeom>
+        </p:spPr>
+      </p:sp>
+      <p:sp>
+        <p:nvSpPr>
+          <p:cNvPr id="433" name="Google Shape;433;g3cf4798b604_0_426:notes">
+            <a:extLst>
+              <a:ext uri="{FF2B5EF4-FFF2-40B4-BE49-F238E27FC236}">
+                <a16:creationId xmlns:a16="http://schemas.microsoft.com/office/drawing/2014/main" id="{4E7023E5-E1CC-503D-1168-A733D8F46340}"/>
+              </a:ext>
+            </a:extLst>
+          </p:cNvPr>
+          <p:cNvSpPr txBox="1">
+            <a:spLocks noGrp="1"/>
+          </p:cNvSpPr>
+          <p:nvPr>
+            <p:ph type="body" idx="1"/>
+          </p:nvPr>
+        </p:nvSpPr>
+        <p:spPr>
+          <a:xfrm>
+            <a:off x="685800" y="4343400"/>
+            <a:ext cx="5486400" cy="4114800"/>
+          </a:xfrm>
+          <a:prstGeom prst="rect">
+            <a:avLst/>
+          </a:prstGeom>
+        </p:spPr>
+        <p:txBody>
+          <a:bodyPr spcFirstLastPara="1" wrap="square" lIns="91425" tIns="91425" rIns="91425" bIns="91425" anchor="t" anchorCtr="0">
+            <a:noAutofit/>
+          </a:bodyPr>
+          <a:lstStyle/>
+          <a:p>
+            <a:pPr marL="0" lvl="0" indent="0" algn="l" rtl="0">
+              <a:spcBef>
+                <a:spcPts val="0"/>
+              </a:spcBef>
+              <a:spcAft>
+                <a:spcPts val="0"/>
+              </a:spcAft>
+              <a:buNone/>
+            </a:pPr>
+            <a:endParaRPr/>
+          </a:p>
+        </p:txBody>
+      </p:sp>
+    </p:spTree>
+    <p:extLst>
+      <p:ext uri="{BB962C8B-B14F-4D97-AF65-F5344CB8AC3E}">
+        <p14:creationId xmlns:p14="http://schemas.microsoft.com/office/powerpoint/2010/main" val="1370071549"/>
       </p:ext>
     </p:extLst>
   </p:cSld>
@@ -34182,11 +34566,157 @@
               <a:buSzPts val="2800"/>
               <a:buAutoNum type="arabicPeriod"/>
             </a:pPr>
+            <a:r>
+              <a:rPr lang="ko-KR" altLang="en-US" dirty="0"/>
+              <a:t>정수삼각형 </a:t>
+            </a:r>
+            <a:r>
+              <a:rPr lang="en-US" altLang="ko-KR" dirty="0"/>
+              <a:t>(Programmers, DP)</a:t>
+            </a:r>
             <a:endParaRPr dirty="0"/>
           </a:p>
         </p:txBody>
       </p:sp>
     </p:spTree>
+  </p:cSld>
+  <p:clrMapOvr>
+    <a:masterClrMapping/>
+  </p:clrMapOvr>
+</p:sld>
+</file>
+
+<file path=ppt/slides/slide10.xml><?xml version="1.0" encoding="utf-8"?>
+<p:sld xmlns:a="http://schemas.openxmlformats.org/drawingml/2006/main" xmlns:r="http://schemas.openxmlformats.org/officeDocument/2006/relationships" xmlns:p="http://schemas.openxmlformats.org/presentationml/2006/main">
+  <p:cSld>
+    <p:spTree>
+      <p:nvGrpSpPr>
+        <p:cNvPr id="1" name="Shape 434">
+          <a:extLst>
+            <a:ext uri="{FF2B5EF4-FFF2-40B4-BE49-F238E27FC236}">
+              <a16:creationId xmlns:a16="http://schemas.microsoft.com/office/drawing/2014/main" id="{34507844-5BF3-AD38-0049-C1A28B4A5F13}"/>
+            </a:ext>
+          </a:extLst>
+        </p:cNvPr>
+        <p:cNvGrpSpPr/>
+        <p:nvPr/>
+      </p:nvGrpSpPr>
+      <p:grpSpPr>
+        <a:xfrm>
+          <a:off x="0" y="0"/>
+          <a:ext cx="0" cy="0"/>
+          <a:chOff x="0" y="0"/>
+          <a:chExt cx="0" cy="0"/>
+        </a:xfrm>
+      </p:grpSpPr>
+      <p:sp>
+        <p:nvSpPr>
+          <p:cNvPr id="435" name="Google Shape;435;p24">
+            <a:extLst>
+              <a:ext uri="{FF2B5EF4-FFF2-40B4-BE49-F238E27FC236}">
+                <a16:creationId xmlns:a16="http://schemas.microsoft.com/office/drawing/2014/main" id="{E86289D8-523B-C1D3-3C7D-F020D49D0A3C}"/>
+              </a:ext>
+            </a:extLst>
+          </p:cNvPr>
+          <p:cNvSpPr txBox="1">
+            <a:spLocks noGrp="1"/>
+          </p:cNvSpPr>
+          <p:nvPr>
+            <p:ph type="title"/>
+          </p:nvPr>
+        </p:nvSpPr>
+        <p:spPr>
+          <a:xfrm>
+            <a:off x="722388" y="362600"/>
+            <a:ext cx="7699200" cy="572700"/>
+          </a:xfrm>
+          <a:prstGeom prst="rect">
+            <a:avLst/>
+          </a:prstGeom>
+        </p:spPr>
+        <p:txBody>
+          <a:bodyPr spcFirstLastPara="1" wrap="square" lIns="91425" tIns="91425" rIns="91425" bIns="91425" anchor="t" anchorCtr="0">
+            <a:noAutofit/>
+          </a:bodyPr>
+          <a:lstStyle/>
+          <a:p>
+            <a:pPr marL="50800" lvl="0"/>
+            <a:r>
+              <a:rPr lang="en-US" dirty="0"/>
+              <a:t>10. </a:t>
+            </a:r>
+            <a:r>
+              <a:rPr lang="en-US" altLang="ko-KR" dirty="0"/>
+              <a:t>RGB</a:t>
+            </a:r>
+            <a:r>
+              <a:rPr lang="ko-KR" altLang="en-US" dirty="0"/>
+              <a:t>거리 </a:t>
+            </a:r>
+            <a:r>
+              <a:rPr lang="en-US" altLang="ko-KR" dirty="0"/>
+              <a:t>(</a:t>
+            </a:r>
+            <a:r>
+              <a:rPr lang="en-US" altLang="ko-KR" dirty="0" err="1"/>
+              <a:t>TUKorea</a:t>
+            </a:r>
+            <a:r>
+              <a:rPr lang="en-US" altLang="ko-KR" dirty="0"/>
+              <a:t>,</a:t>
+            </a:r>
+            <a:r>
+              <a:rPr lang="ko-KR" altLang="en-US" dirty="0"/>
+              <a:t>백준</a:t>
+            </a:r>
+            <a:r>
+              <a:rPr lang="en-US" altLang="ko-KR" dirty="0"/>
+              <a:t>1149, DP)</a:t>
+            </a:r>
+            <a:r>
+              <a:rPr lang="en-US" altLang="ko-KR" sz="2400" dirty="0"/>
+              <a:t> </a:t>
+            </a:r>
+            <a:endParaRPr dirty="0"/>
+          </a:p>
+        </p:txBody>
+      </p:sp>
+      <p:pic>
+        <p:nvPicPr>
+          <p:cNvPr id="3" name="그림 2">
+            <a:extLst>
+              <a:ext uri="{FF2B5EF4-FFF2-40B4-BE49-F238E27FC236}">
+                <a16:creationId xmlns:a16="http://schemas.microsoft.com/office/drawing/2014/main" id="{9F3DF217-4BFE-1FFF-662F-E35977D14F09}"/>
+              </a:ext>
+            </a:extLst>
+          </p:cNvPr>
+          <p:cNvPicPr>
+            <a:picLocks noChangeAspect="1"/>
+          </p:cNvPicPr>
+          <p:nvPr/>
+        </p:nvPicPr>
+        <p:blipFill>
+          <a:blip r:embed="rId3"/>
+          <a:stretch>
+            <a:fillRect/>
+          </a:stretch>
+        </p:blipFill>
+        <p:spPr>
+          <a:xfrm>
+            <a:off x="1386998" y="935300"/>
+            <a:ext cx="6369979" cy="3732700"/>
+          </a:xfrm>
+          <a:prstGeom prst="rect">
+            <a:avLst/>
+          </a:prstGeom>
+        </p:spPr>
+      </p:pic>
+    </p:spTree>
+    <p:extLst>
+      <p:ext uri="{BB962C8B-B14F-4D97-AF65-F5344CB8AC3E}">
+        <p14:creationId xmlns:p14="http://schemas.microsoft.com/office/powerpoint/2010/main" val="3644593793"/>
+      </p:ext>
+    </p:extLst>
   </p:cSld>
   <p:clrMapOvr>
     <a:masterClrMapping/>
@@ -34248,18 +34778,18 @@
           </a:bodyPr>
           <a:lstStyle/>
           <a:p>
-            <a:pPr marL="50800" lvl="0" algn="ctr" rtl="0">
-              <a:spcBef>
-                <a:spcPts val="0"/>
-              </a:spcBef>
-              <a:spcAft>
-                <a:spcPts val="0"/>
-              </a:spcAft>
-              <a:buSzPts val="2800"/>
-            </a:pPr>
+            <a:pPr marL="50800" lvl="0"/>
             <a:r>
               <a:rPr lang="en-US" dirty="0"/>
               <a:t>2. </a:t>
+            </a:r>
+            <a:r>
+              <a:rPr lang="ko-KR" altLang="en-US" dirty="0"/>
+              <a:t>등굣길</a:t>
+            </a:r>
+            <a:r>
+              <a:rPr lang="en-US" altLang="ko-KR" dirty="0"/>
+              <a:t>(Programmers, DP)</a:t>
             </a:r>
             <a:endParaRPr dirty="0"/>
           </a:p>
@@ -34332,18 +34862,30 @@
           </a:bodyPr>
           <a:lstStyle/>
           <a:p>
-            <a:pPr marL="50800" lvl="0" algn="ctr" rtl="0">
-              <a:spcBef>
-                <a:spcPts val="0"/>
-              </a:spcBef>
-              <a:spcAft>
-                <a:spcPts val="0"/>
-              </a:spcAft>
-              <a:buSzPts val="2800"/>
-            </a:pPr>
+            <a:pPr marL="50800" lvl="0"/>
             <a:r>
               <a:rPr lang="en-US" dirty="0"/>
               <a:t>3. </a:t>
+            </a:r>
+            <a:r>
+              <a:rPr lang="ko-KR" altLang="en-US" dirty="0"/>
+              <a:t>베스트 앨범 </a:t>
+            </a:r>
+            <a:r>
+              <a:rPr lang="fr-FR" altLang="ko-KR" dirty="0"/>
+              <a:t>(Programmers, </a:t>
+            </a:r>
+            <a:r>
+              <a:rPr lang="ko-KR" altLang="en-US" dirty="0"/>
+              <a:t>구현</a:t>
+            </a:r>
+            <a:r>
+              <a:rPr lang="fr-FR" altLang="ko-KR" dirty="0"/>
+              <a:t>) </a:t>
+            </a:r>
+            <a:r>
+              <a:rPr lang="en-US" dirty="0"/>
+              <a:t> </a:t>
             </a:r>
             <a:endParaRPr dirty="0"/>
           </a:p>
@@ -34416,18 +34958,30 @@
           </a:bodyPr>
           <a:lstStyle/>
           <a:p>
-            <a:pPr marL="50800" lvl="0" algn="ctr" rtl="0">
-              <a:spcBef>
-                <a:spcPts val="0"/>
-              </a:spcBef>
-              <a:spcAft>
-                <a:spcPts val="0"/>
-              </a:spcAft>
-              <a:buSzPts val="2800"/>
-            </a:pPr>
+            <a:pPr marL="50800" lvl="0"/>
             <a:r>
               <a:rPr lang="en-US" dirty="0"/>
               <a:t>4. </a:t>
+            </a:r>
+            <a:r>
+              <a:rPr lang="ko-KR" altLang="en-US" dirty="0" err="1"/>
+              <a:t>신고결과받기</a:t>
+            </a:r>
+            <a:r>
+              <a:rPr lang="ko-KR" altLang="en-US" dirty="0"/>
+              <a:t> </a:t>
+            </a:r>
+            <a:r>
+              <a:rPr lang="en-US" altLang="ko-KR" dirty="0"/>
+              <a:t>(Programmers, </a:t>
+            </a:r>
+            <a:r>
+              <a:rPr lang="ko-KR" altLang="en-US" dirty="0"/>
+              <a:t>구현</a:t>
+            </a:r>
+            <a:r>
+              <a:rPr lang="en-US" altLang="ko-KR" dirty="0"/>
+              <a:t>) </a:t>
             </a:r>
             <a:endParaRPr dirty="0"/>
           </a:p>
@@ -34644,23 +35198,69 @@
           </a:bodyPr>
           <a:lstStyle/>
           <a:p>
-            <a:pPr marL="50800" lvl="0" algn="ctr" rtl="0">
-              <a:spcBef>
-                <a:spcPts val="0"/>
-              </a:spcBef>
-              <a:spcAft>
-                <a:spcPts val="0"/>
-              </a:spcAft>
-              <a:buSzPts val="2800"/>
-            </a:pPr>
+            <a:pPr marL="50800" lvl="0"/>
             <a:r>
               <a:rPr lang="en-US" dirty="0"/>
               <a:t>6. </a:t>
+            </a:r>
+            <a:r>
+              <a:rPr lang="ko-KR" altLang="en-US" dirty="0"/>
+              <a:t>설탕배달 </a:t>
+            </a:r>
+            <a:r>
+              <a:rPr lang="en-US" altLang="ko-KR" dirty="0"/>
+              <a:t>(</a:t>
+            </a:r>
+            <a:r>
+              <a:rPr lang="en-US" altLang="ko-KR" dirty="0" err="1"/>
+              <a:t>TUKorea</a:t>
+            </a:r>
+            <a:r>
+              <a:rPr lang="en-US" altLang="ko-KR" dirty="0"/>
+              <a:t>, </a:t>
+            </a:r>
+            <a:r>
+              <a:rPr lang="ko-KR" altLang="en-US" dirty="0"/>
+              <a:t>백준</a:t>
+            </a:r>
+            <a:r>
+              <a:rPr lang="en-US" altLang="ko-KR" dirty="0"/>
+              <a:t>2839, DP) </a:t>
             </a:r>
             <a:endParaRPr dirty="0"/>
           </a:p>
         </p:txBody>
       </p:sp>
+      <p:pic>
+        <p:nvPicPr>
+          <p:cNvPr id="3" name="그림 2">
+            <a:extLst>
+              <a:ext uri="{FF2B5EF4-FFF2-40B4-BE49-F238E27FC236}">
+                <a16:creationId xmlns:a16="http://schemas.microsoft.com/office/drawing/2014/main" id="{EBCE2DAF-D893-1763-13E6-193BC5786174}"/>
+              </a:ext>
+            </a:extLst>
+          </p:cNvPr>
+          <p:cNvPicPr>
+            <a:picLocks noChangeAspect="1"/>
+          </p:cNvPicPr>
+          <p:nvPr/>
+        </p:nvPicPr>
+        <p:blipFill>
+          <a:blip r:embed="rId3"/>
+          <a:stretch>
+            <a:fillRect/>
+          </a:stretch>
+        </p:blipFill>
+        <p:spPr>
+          <a:xfrm>
+            <a:off x="2873664" y="935300"/>
+            <a:ext cx="3396648" cy="3899368"/>
+          </a:xfrm>
+          <a:prstGeom prst="rect">
+            <a:avLst/>
+          </a:prstGeom>
+        </p:spPr>
+      </p:pic>
     </p:spTree>
     <p:extLst>
       <p:ext uri="{BB962C8B-B14F-4D97-AF65-F5344CB8AC3E}">
@@ -34728,18 +35328,168 @@
           </a:bodyPr>
           <a:lstStyle/>
           <a:p>
-            <a:pPr marL="50800" lvl="0" algn="ctr" rtl="0">
-              <a:spcBef>
-                <a:spcPts val="0"/>
-              </a:spcBef>
-              <a:spcAft>
-                <a:spcPts val="0"/>
-              </a:spcAft>
-              <a:buSzPts val="2800"/>
-            </a:pPr>
+            <a:pPr marL="50800" lvl="0"/>
             <a:r>
               <a:rPr lang="en-US" dirty="0"/>
               <a:t>7. </a:t>
+            </a:r>
+            <a:r>
+              <a:rPr lang="en-US" altLang="ko-KR" dirty="0"/>
+              <a:t>1</a:t>
+            </a:r>
+            <a:r>
+              <a:rPr lang="ko-KR" altLang="en-US" dirty="0"/>
+              <a:t>로 만들기 </a:t>
+            </a:r>
+            <a:r>
+              <a:rPr lang="en-US" altLang="ko-KR" dirty="0"/>
+              <a:t>(</a:t>
+            </a:r>
+            <a:r>
+              <a:rPr lang="en-US" altLang="ko-KR" dirty="0" err="1"/>
+              <a:t>TUKorea</a:t>
+            </a:r>
+            <a:r>
+              <a:rPr lang="en-US" altLang="ko-KR" dirty="0"/>
+              <a:t>, </a:t>
+            </a:r>
+            <a:r>
+              <a:rPr lang="ko-KR" altLang="en-US" dirty="0"/>
+              <a:t>백준</a:t>
+            </a:r>
+            <a:r>
+              <a:rPr lang="en-US" altLang="ko-KR" dirty="0"/>
+              <a:t>1463, DP) </a:t>
+            </a:r>
+            <a:endParaRPr dirty="0"/>
+          </a:p>
+        </p:txBody>
+      </p:sp>
+      <p:pic>
+        <p:nvPicPr>
+          <p:cNvPr id="3" name="그림 2">
+            <a:extLst>
+              <a:ext uri="{FF2B5EF4-FFF2-40B4-BE49-F238E27FC236}">
+                <a16:creationId xmlns:a16="http://schemas.microsoft.com/office/drawing/2014/main" id="{0DE31FE3-D09D-D485-0E19-00704F327FFA}"/>
+              </a:ext>
+            </a:extLst>
+          </p:cNvPr>
+          <p:cNvPicPr>
+            <a:picLocks noChangeAspect="1"/>
+          </p:cNvPicPr>
+          <p:nvPr/>
+        </p:nvPicPr>
+        <p:blipFill>
+          <a:blip r:embed="rId3"/>
+          <a:stretch>
+            <a:fillRect/>
+          </a:stretch>
+        </p:blipFill>
+        <p:spPr>
+          <a:xfrm>
+            <a:off x="2780918" y="935300"/>
+            <a:ext cx="3582139" cy="3845600"/>
+          </a:xfrm>
+          <a:prstGeom prst="rect">
+            <a:avLst/>
+          </a:prstGeom>
+        </p:spPr>
+      </p:pic>
+    </p:spTree>
+    <p:extLst>
+      <p:ext uri="{BB962C8B-B14F-4D97-AF65-F5344CB8AC3E}">
+        <p14:creationId xmlns:p14="http://schemas.microsoft.com/office/powerpoint/2010/main" val="1305028121"/>
+      </p:ext>
+    </p:extLst>
+  </p:cSld>
+  <p:clrMapOvr>
+    <a:masterClrMapping/>
+  </p:clrMapOvr>
+</p:sld>
+</file>
+
+<file path=ppt/slides/slide8.xml><?xml version="1.0" encoding="utf-8"?>
+<p:sld xmlns:a="http://schemas.openxmlformats.org/drawingml/2006/main" xmlns:r="http://schemas.openxmlformats.org/officeDocument/2006/relationships" xmlns:p="http://schemas.openxmlformats.org/presentationml/2006/main">
+  <p:cSld>
+    <p:spTree>
+      <p:nvGrpSpPr>
+        <p:cNvPr id="1" name="Shape 434">
+          <a:extLst>
+            <a:ext uri="{FF2B5EF4-FFF2-40B4-BE49-F238E27FC236}">
+              <a16:creationId xmlns:a16="http://schemas.microsoft.com/office/drawing/2014/main" id="{E2E03861-2A88-5FC5-FA53-47F9E5063A8E}"/>
+            </a:ext>
+          </a:extLst>
+        </p:cNvPr>
+        <p:cNvGrpSpPr/>
+        <p:nvPr/>
+      </p:nvGrpSpPr>
+      <p:grpSpPr>
+        <a:xfrm>
+          <a:off x="0" y="0"/>
+          <a:ext cx="0" cy="0"/>
+          <a:chOff x="0" y="0"/>
+          <a:chExt cx="0" cy="0"/>
+        </a:xfrm>
+      </p:grpSpPr>
+      <p:sp>
+        <p:nvSpPr>
+          <p:cNvPr id="435" name="Google Shape;435;p24">
+            <a:extLst>
+              <a:ext uri="{FF2B5EF4-FFF2-40B4-BE49-F238E27FC236}">
+                <a16:creationId xmlns:a16="http://schemas.microsoft.com/office/drawing/2014/main" id="{61B0D5A9-8B0C-5FD6-F81B-47F709BAD361}"/>
+              </a:ext>
+            </a:extLst>
+          </p:cNvPr>
+          <p:cNvSpPr txBox="1">
+            <a:spLocks noGrp="1"/>
+          </p:cNvSpPr>
+          <p:nvPr>
+            <p:ph type="title"/>
+          </p:nvPr>
+        </p:nvSpPr>
+        <p:spPr>
+          <a:xfrm>
+            <a:off x="722388" y="362600"/>
+            <a:ext cx="7699200" cy="572700"/>
+          </a:xfrm>
+          <a:prstGeom prst="rect">
+            <a:avLst/>
+          </a:prstGeom>
+        </p:spPr>
+        <p:txBody>
+          <a:bodyPr spcFirstLastPara="1" wrap="square" lIns="91425" tIns="91425" rIns="91425" bIns="91425" anchor="t" anchorCtr="0">
+            <a:noAutofit/>
+          </a:bodyPr>
+          <a:lstStyle/>
+          <a:p>
+            <a:pPr marL="50800" lvl="0"/>
+            <a:r>
+              <a:rPr lang="en-US" dirty="0"/>
+              <a:t>8. </a:t>
+            </a:r>
+            <a:r>
+              <a:rPr lang="ko-KR" altLang="en-US" dirty="0"/>
+              <a:t>내려가기 </a:t>
+            </a:r>
+            <a:r>
+              <a:rPr lang="en-US" altLang="ko-KR" dirty="0"/>
+              <a:t>(</a:t>
+            </a:r>
+            <a:r>
+              <a:rPr lang="en-US" altLang="ko-KR" dirty="0" err="1"/>
+              <a:t>TUKorea</a:t>
+            </a:r>
+            <a:r>
+              <a:rPr lang="en-US" altLang="ko-KR" dirty="0"/>
+              <a:t>, </a:t>
+            </a:r>
+            <a:r>
+              <a:rPr lang="ko-KR" altLang="en-US" dirty="0"/>
+              <a:t>백준</a:t>
+            </a:r>
+            <a:r>
+              <a:rPr lang="en-US" altLang="ko-KR" dirty="0"/>
+              <a:t>2096, DP) </a:t>
             </a:r>
             <a:endParaRPr dirty="0"/>
           </a:p>
@@ -34748,7 +35498,141 @@
     </p:spTree>
     <p:extLst>
       <p:ext uri="{BB962C8B-B14F-4D97-AF65-F5344CB8AC3E}">
-        <p14:creationId xmlns:p14="http://schemas.microsoft.com/office/powerpoint/2010/main" val="1305028121"/>
+        <p14:creationId xmlns:p14="http://schemas.microsoft.com/office/powerpoint/2010/main" val="4013083565"/>
+      </p:ext>
+    </p:extLst>
+  </p:cSld>
+  <p:clrMapOvr>
+    <a:masterClrMapping/>
+  </p:clrMapOvr>
+</p:sld>
+</file>
+
+<file path=ppt/slides/slide9.xml><?xml version="1.0" encoding="utf-8"?>
+<p:sld xmlns:a="http://schemas.openxmlformats.org/drawingml/2006/main" xmlns:r="http://schemas.openxmlformats.org/officeDocument/2006/relationships" xmlns:p="http://schemas.openxmlformats.org/presentationml/2006/main">
+  <p:cSld>
+    <p:spTree>
+      <p:nvGrpSpPr>
+        <p:cNvPr id="1" name="Shape 434">
+          <a:extLst>
+            <a:ext uri="{FF2B5EF4-FFF2-40B4-BE49-F238E27FC236}">
+              <a16:creationId xmlns:a16="http://schemas.microsoft.com/office/drawing/2014/main" id="{476118DF-1950-FF27-BCA8-E8CA9EB788AE}"/>
+            </a:ext>
+          </a:extLst>
+        </p:cNvPr>
+        <p:cNvGrpSpPr/>
+        <p:nvPr/>
+      </p:nvGrpSpPr>
+      <p:grpSpPr>
+        <a:xfrm>
+          <a:off x="0" y="0"/>
+          <a:ext cx="0" cy="0"/>
+          <a:chOff x="0" y="0"/>
+          <a:chExt cx="0" cy="0"/>
+        </a:xfrm>
+      </p:grpSpPr>
+      <p:sp>
+        <p:nvSpPr>
+          <p:cNvPr id="435" name="Google Shape;435;p24">
+            <a:extLst>
+              <a:ext uri="{FF2B5EF4-FFF2-40B4-BE49-F238E27FC236}">
+                <a16:creationId xmlns:a16="http://schemas.microsoft.com/office/drawing/2014/main" id="{8C1C324D-3236-47D9-61AB-D696CDC4C614}"/>
+              </a:ext>
+            </a:extLst>
+          </p:cNvPr>
+          <p:cNvSpPr txBox="1">
+            <a:spLocks noGrp="1"/>
+          </p:cNvSpPr>
+          <p:nvPr>
+            <p:ph type="title"/>
+          </p:nvPr>
+        </p:nvSpPr>
+        <p:spPr>
+          <a:xfrm>
+            <a:off x="-188259" y="362600"/>
+            <a:ext cx="9735671" cy="572700"/>
+          </a:xfrm>
+          <a:prstGeom prst="rect">
+            <a:avLst/>
+          </a:prstGeom>
+        </p:spPr>
+        <p:txBody>
+          <a:bodyPr spcFirstLastPara="1" wrap="square" lIns="91425" tIns="91425" rIns="91425" bIns="91425" anchor="t" anchorCtr="0">
+            <a:noAutofit/>
+          </a:bodyPr>
+          <a:lstStyle/>
+          <a:p>
+            <a:pPr marL="50800" lvl="0"/>
+            <a:r>
+              <a:rPr lang="en-US" dirty="0"/>
+              <a:t>9. </a:t>
+            </a:r>
+            <a:r>
+              <a:rPr lang="ko-KR" altLang="en-US" dirty="0"/>
+              <a:t>가장 큰 증가하는 부분 수열 </a:t>
+            </a:r>
+            <a:r>
+              <a:rPr lang="en-US" altLang="ko-KR" dirty="0"/>
+              <a:t>(</a:t>
+            </a:r>
+            <a:r>
+              <a:rPr lang="en-US" altLang="ko-KR" dirty="0" err="1"/>
+              <a:t>TUKorea</a:t>
+            </a:r>
+            <a:r>
+              <a:rPr lang="en-US" altLang="ko-KR" dirty="0"/>
+              <a:t>,</a:t>
+            </a:r>
+            <a:r>
+              <a:rPr lang="ko-KR" altLang="en-US" dirty="0"/>
+              <a:t>백준</a:t>
+            </a:r>
+            <a:r>
+              <a:rPr lang="en-US" altLang="ko-KR" dirty="0"/>
+              <a:t>11055,DP)</a:t>
+            </a:r>
+            <a:r>
+              <a:rPr lang="en-US" altLang="ko-KR" sz="2400" dirty="0"/>
+              <a:t> </a:t>
+            </a:r>
+            <a:endParaRPr dirty="0"/>
+          </a:p>
+        </p:txBody>
+      </p:sp>
+      <p:pic>
+        <p:nvPicPr>
+          <p:cNvPr id="2" name="그림 1">
+            <a:extLst>
+              <a:ext uri="{FF2B5EF4-FFF2-40B4-BE49-F238E27FC236}">
+                <a16:creationId xmlns:a16="http://schemas.microsoft.com/office/drawing/2014/main" id="{CAA658BB-9FED-8266-4346-ED085F6CB219}"/>
+              </a:ext>
+            </a:extLst>
+          </p:cNvPr>
+          <p:cNvPicPr>
+            <a:picLocks noChangeAspect="1"/>
+          </p:cNvPicPr>
+          <p:nvPr/>
+        </p:nvPicPr>
+        <p:blipFill>
+          <a:blip r:embed="rId3"/>
+          <a:stretch>
+            <a:fillRect/>
+          </a:stretch>
+        </p:blipFill>
+        <p:spPr>
+          <a:xfrm>
+            <a:off x="1380565" y="1082469"/>
+            <a:ext cx="6877394" cy="3698431"/>
+          </a:xfrm>
+          <a:prstGeom prst="rect">
+            <a:avLst/>
+          </a:prstGeom>
+        </p:spPr>
+      </p:pic>
+    </p:spTree>
+    <p:extLst>
+      <p:ext uri="{BB962C8B-B14F-4D97-AF65-F5344CB8AC3E}">
+        <p14:creationId xmlns:p14="http://schemas.microsoft.com/office/powerpoint/2010/main" val="332818343"/>
       </p:ext>
     </p:extLst>
   </p:cSld>

--- a/문제해결프로그래밍_숙제/제출용/숙제6_2022182035.pptx
+++ b/문제해결프로그래밍_숙제/제출용/숙제6_2022182035.pptx
@@ -34578,6 +34578,66 @@
           </a:p>
         </p:txBody>
       </p:sp>
+      <p:pic>
+        <p:nvPicPr>
+          <p:cNvPr id="3" name="그림 2">
+            <a:extLst>
+              <a:ext uri="{FF2B5EF4-FFF2-40B4-BE49-F238E27FC236}">
+                <a16:creationId xmlns:a16="http://schemas.microsoft.com/office/drawing/2014/main" id="{8F9EB5D3-0971-D122-A7A2-D0645C18E289}"/>
+              </a:ext>
+            </a:extLst>
+          </p:cNvPr>
+          <p:cNvPicPr>
+            <a:picLocks noChangeAspect="1"/>
+          </p:cNvPicPr>
+          <p:nvPr/>
+        </p:nvPicPr>
+        <p:blipFill>
+          <a:blip r:embed="rId3"/>
+          <a:stretch>
+            <a:fillRect/>
+          </a:stretch>
+        </p:blipFill>
+        <p:spPr>
+          <a:xfrm>
+            <a:off x="1257565" y="1180215"/>
+            <a:ext cx="3314423" cy="3415400"/>
+          </a:xfrm>
+          <a:prstGeom prst="rect">
+            <a:avLst/>
+          </a:prstGeom>
+        </p:spPr>
+      </p:pic>
+      <p:pic>
+        <p:nvPicPr>
+          <p:cNvPr id="5" name="그림 4">
+            <a:extLst>
+              <a:ext uri="{FF2B5EF4-FFF2-40B4-BE49-F238E27FC236}">
+                <a16:creationId xmlns:a16="http://schemas.microsoft.com/office/drawing/2014/main" id="{84573545-2924-0091-3C91-FE0804B6BBE0}"/>
+              </a:ext>
+            </a:extLst>
+          </p:cNvPr>
+          <p:cNvPicPr>
+            <a:picLocks noChangeAspect="1"/>
+          </p:cNvPicPr>
+          <p:nvPr/>
+        </p:nvPicPr>
+        <p:blipFill>
+          <a:blip r:embed="rId4"/>
+          <a:stretch>
+            <a:fillRect/>
+          </a:stretch>
+        </p:blipFill>
+        <p:spPr>
+          <a:xfrm>
+            <a:off x="4903801" y="1180215"/>
+            <a:ext cx="2129288" cy="3415400"/>
+          </a:xfrm>
+          <a:prstGeom prst="rect">
+            <a:avLst/>
+          </a:prstGeom>
+        </p:spPr>
+      </p:pic>
     </p:spTree>
   </p:cSld>
   <p:clrMapOvr>
@@ -34795,6 +34855,66 @@
           </a:p>
         </p:txBody>
       </p:sp>
+      <p:pic>
+        <p:nvPicPr>
+          <p:cNvPr id="3" name="그림 2">
+            <a:extLst>
+              <a:ext uri="{FF2B5EF4-FFF2-40B4-BE49-F238E27FC236}">
+                <a16:creationId xmlns:a16="http://schemas.microsoft.com/office/drawing/2014/main" id="{4B96C99A-887D-9C45-9068-620E91CA3678}"/>
+              </a:ext>
+            </a:extLst>
+          </p:cNvPr>
+          <p:cNvPicPr>
+            <a:picLocks noChangeAspect="1"/>
+          </p:cNvPicPr>
+          <p:nvPr/>
+        </p:nvPicPr>
+        <p:blipFill>
+          <a:blip r:embed="rId3"/>
+          <a:stretch>
+            <a:fillRect/>
+          </a:stretch>
+        </p:blipFill>
+        <p:spPr>
+          <a:xfrm>
+            <a:off x="1785181" y="985077"/>
+            <a:ext cx="2786807" cy="3795823"/>
+          </a:xfrm>
+          <a:prstGeom prst="rect">
+            <a:avLst/>
+          </a:prstGeom>
+        </p:spPr>
+      </p:pic>
+      <p:pic>
+        <p:nvPicPr>
+          <p:cNvPr id="5" name="그림 4">
+            <a:extLst>
+              <a:ext uri="{FF2B5EF4-FFF2-40B4-BE49-F238E27FC236}">
+                <a16:creationId xmlns:a16="http://schemas.microsoft.com/office/drawing/2014/main" id="{38DEA53E-9AC6-B20B-042D-8ED28F1CC9F6}"/>
+              </a:ext>
+            </a:extLst>
+          </p:cNvPr>
+          <p:cNvPicPr>
+            <a:picLocks noChangeAspect="1"/>
+          </p:cNvPicPr>
+          <p:nvPr/>
+        </p:nvPicPr>
+        <p:blipFill>
+          <a:blip r:embed="rId4"/>
+          <a:stretch>
+            <a:fillRect/>
+          </a:stretch>
+        </p:blipFill>
+        <p:spPr>
+          <a:xfrm>
+            <a:off x="5050453" y="985077"/>
+            <a:ext cx="2647507" cy="3795823"/>
+          </a:xfrm>
+          <a:prstGeom prst="rect">
+            <a:avLst/>
+          </a:prstGeom>
+        </p:spPr>
+      </p:pic>
     </p:spTree>
     <p:extLst>
       <p:ext uri="{BB962C8B-B14F-4D97-AF65-F5344CB8AC3E}">
@@ -34891,6 +35011,65 @@
           </a:p>
         </p:txBody>
       </p:sp>
+      <p:pic>
+        <p:nvPicPr>
+          <p:cNvPr id="3" name="그림 2">
+            <a:extLst>
+              <a:ext uri="{FF2B5EF4-FFF2-40B4-BE49-F238E27FC236}">
+                <a16:creationId xmlns:a16="http://schemas.microsoft.com/office/drawing/2014/main" id="{5FD12166-9ACB-520A-9884-7554ACAB677D}"/>
+              </a:ext>
+            </a:extLst>
+          </p:cNvPr>
+          <p:cNvPicPr>
+            <a:picLocks noChangeAspect="1"/>
+          </p:cNvPicPr>
+          <p:nvPr/>
+        </p:nvPicPr>
+        <p:blipFill>
+          <a:blip r:embed="rId3"/>
+          <a:stretch>
+            <a:fillRect/>
+          </a:stretch>
+        </p:blipFill>
+        <p:spPr>
+          <a:xfrm>
+            <a:off x="2206649" y="1160448"/>
+            <a:ext cx="2092588" cy="3682040"/>
+          </a:xfrm>
+          <a:prstGeom prst="rect">
+            <a:avLst/>
+          </a:prstGeom>
+        </p:spPr>
+      </p:pic>
+      <p:pic>
+        <p:nvPicPr>
+          <p:cNvPr id="5" name="그림 4">
+            <a:extLst>
+              <a:ext uri="{FF2B5EF4-FFF2-40B4-BE49-F238E27FC236}">
+                <a16:creationId xmlns:a16="http://schemas.microsoft.com/office/drawing/2014/main" id="{C476D8AA-4C03-2128-A49D-F9F7358F626E}"/>
+              </a:ext>
+            </a:extLst>
+          </p:cNvPr>
+          <p:cNvPicPr>
+            <a:picLocks noChangeAspect="1"/>
+          </p:cNvPicPr>
+          <p:nvPr/>
+        </p:nvPicPr>
+        <p:blipFill>
+          <a:blip r:embed="rId4"/>
+          <a:srcRect r="35962"/>
+          <a:stretch/>
+        </p:blipFill>
+        <p:spPr>
+          <a:xfrm>
+            <a:off x="5121211" y="1381856"/>
+            <a:ext cx="2497209" cy="3239224"/>
+          </a:xfrm>
+          <a:prstGeom prst="rect">
+            <a:avLst/>
+          </a:prstGeom>
+        </p:spPr>
+      </p:pic>
     </p:spTree>
     <p:extLst>
       <p:ext uri="{BB962C8B-B14F-4D97-AF65-F5344CB8AC3E}">
@@ -34987,6 +35166,66 @@
           </a:p>
         </p:txBody>
       </p:sp>
+      <p:pic>
+        <p:nvPicPr>
+          <p:cNvPr id="3" name="그림 2">
+            <a:extLst>
+              <a:ext uri="{FF2B5EF4-FFF2-40B4-BE49-F238E27FC236}">
+                <a16:creationId xmlns:a16="http://schemas.microsoft.com/office/drawing/2014/main" id="{D2C087BA-6E64-939E-476C-0A8EAB38B643}"/>
+              </a:ext>
+            </a:extLst>
+          </p:cNvPr>
+          <p:cNvPicPr>
+            <a:picLocks noChangeAspect="1"/>
+          </p:cNvPicPr>
+          <p:nvPr/>
+        </p:nvPicPr>
+        <p:blipFill>
+          <a:blip r:embed="rId3"/>
+          <a:stretch>
+            <a:fillRect/>
+          </a:stretch>
+        </p:blipFill>
+        <p:spPr>
+          <a:xfrm>
+            <a:off x="2223343" y="1020726"/>
+            <a:ext cx="2348645" cy="3880884"/>
+          </a:xfrm>
+          <a:prstGeom prst="rect">
+            <a:avLst/>
+          </a:prstGeom>
+        </p:spPr>
+      </p:pic>
+      <p:pic>
+        <p:nvPicPr>
+          <p:cNvPr id="5" name="그림 4">
+            <a:extLst>
+              <a:ext uri="{FF2B5EF4-FFF2-40B4-BE49-F238E27FC236}">
+                <a16:creationId xmlns:a16="http://schemas.microsoft.com/office/drawing/2014/main" id="{8CF8F444-8F66-B5C7-A3A2-30BFA55C5653}"/>
+              </a:ext>
+            </a:extLst>
+          </p:cNvPr>
+          <p:cNvPicPr>
+            <a:picLocks noChangeAspect="1"/>
+          </p:cNvPicPr>
+          <p:nvPr/>
+        </p:nvPicPr>
+        <p:blipFill>
+          <a:blip r:embed="rId4"/>
+          <a:stretch>
+            <a:fillRect/>
+          </a:stretch>
+        </p:blipFill>
+        <p:spPr>
+          <a:xfrm>
+            <a:off x="4803163" y="1139560"/>
+            <a:ext cx="2383757" cy="3643216"/>
+          </a:xfrm>
+          <a:prstGeom prst="rect">
+            <a:avLst/>
+          </a:prstGeom>
+        </p:spPr>
+      </p:pic>
     </p:spTree>
     <p:extLst>
       <p:ext uri="{BB962C8B-B14F-4D97-AF65-F5344CB8AC3E}">
@@ -35495,6 +35734,66 @@
           </a:p>
         </p:txBody>
       </p:sp>
+      <p:pic>
+        <p:nvPicPr>
+          <p:cNvPr id="3" name="그림 2">
+            <a:extLst>
+              <a:ext uri="{FF2B5EF4-FFF2-40B4-BE49-F238E27FC236}">
+                <a16:creationId xmlns:a16="http://schemas.microsoft.com/office/drawing/2014/main" id="{4ED8DF95-19BE-1904-F024-4E632F75F64D}"/>
+              </a:ext>
+            </a:extLst>
+          </p:cNvPr>
+          <p:cNvPicPr>
+            <a:picLocks noChangeAspect="1"/>
+          </p:cNvPicPr>
+          <p:nvPr/>
+        </p:nvPicPr>
+        <p:blipFill>
+          <a:blip r:embed="rId3"/>
+          <a:stretch>
+            <a:fillRect/>
+          </a:stretch>
+        </p:blipFill>
+        <p:spPr>
+          <a:xfrm>
+            <a:off x="1255716" y="935300"/>
+            <a:ext cx="1936097" cy="3987209"/>
+          </a:xfrm>
+          <a:prstGeom prst="rect">
+            <a:avLst/>
+          </a:prstGeom>
+        </p:spPr>
+      </p:pic>
+      <p:pic>
+        <p:nvPicPr>
+          <p:cNvPr id="5" name="그림 4">
+            <a:extLst>
+              <a:ext uri="{FF2B5EF4-FFF2-40B4-BE49-F238E27FC236}">
+                <a16:creationId xmlns:a16="http://schemas.microsoft.com/office/drawing/2014/main" id="{C6FC0E2E-EB1A-8FC1-884A-2D4E327ACE95}"/>
+              </a:ext>
+            </a:extLst>
+          </p:cNvPr>
+          <p:cNvPicPr>
+            <a:picLocks noChangeAspect="1"/>
+          </p:cNvPicPr>
+          <p:nvPr/>
+        </p:nvPicPr>
+        <p:blipFill>
+          <a:blip r:embed="rId4"/>
+          <a:stretch>
+            <a:fillRect/>
+          </a:stretch>
+        </p:blipFill>
+        <p:spPr>
+          <a:xfrm>
+            <a:off x="3367801" y="2536064"/>
+            <a:ext cx="5168775" cy="785680"/>
+          </a:xfrm>
+          <a:prstGeom prst="rect">
+            <a:avLst/>
+          </a:prstGeom>
+        </p:spPr>
+      </p:pic>
     </p:spTree>
     <p:extLst>
       <p:ext uri="{BB962C8B-B14F-4D97-AF65-F5344CB8AC3E}">
